--- a/你的愛長闊高深.pptx
+++ b/你的愛長闊高深.pptx
@@ -165,7 +165,7 @@
           <a:lstStyle/>
           <a:p>
             <a:r>
-              <a:rPr lang="en-US" altLang="zh-TW" smtClean="0"/>
+              <a:rPr lang="en-US" altLang="zh-TW"/>
               <a:t>Click to edit Master title style</a:t>
             </a:r>
             <a:endParaRPr lang="zh-TW" altLang="en-US"/>
@@ -284,7 +284,7 @@
           </a:lstStyle>
           <a:p>
             <a:r>
-              <a:rPr lang="en-US" altLang="zh-TW" smtClean="0"/>
+              <a:rPr lang="en-US" altLang="zh-TW"/>
               <a:t>Click to edit Master subtitle style</a:t>
             </a:r>
             <a:endParaRPr lang="zh-TW" altLang="en-US"/>
@@ -308,7 +308,7 @@
           <a:p>
             <a:fld id="{73CDC8B0-617F-4E4B-B385-906482340634}" type="datetimeFigureOut">
               <a:rPr lang="en-US" smtClean="0"/>
-              <a:t>2/18/2023</a:t>
+              <a:t>3/6/2026</a:t>
             </a:fld>
             <a:endParaRPr lang="en-US"/>
           </a:p>
@@ -397,7 +397,7 @@
           <a:lstStyle/>
           <a:p>
             <a:r>
-              <a:rPr lang="en-US" altLang="zh-TW" smtClean="0"/>
+              <a:rPr lang="en-US" altLang="zh-TW"/>
               <a:t>Click to edit Master title style</a:t>
             </a:r>
             <a:endParaRPr lang="zh-TW" altLang="en-US"/>
@@ -421,35 +421,35 @@
           <a:p>
             <a:pPr lvl="0"/>
             <a:r>
-              <a:rPr lang="en-US" altLang="zh-TW" smtClean="0"/>
+              <a:rPr lang="en-US" altLang="zh-TW"/>
               <a:t>Click to edit Master text styles</a:t>
             </a:r>
           </a:p>
           <a:p>
             <a:pPr lvl="1"/>
             <a:r>
-              <a:rPr lang="en-US" altLang="zh-TW" smtClean="0"/>
+              <a:rPr lang="en-US" altLang="zh-TW"/>
               <a:t>Second level</a:t>
             </a:r>
           </a:p>
           <a:p>
             <a:pPr lvl="2"/>
             <a:r>
-              <a:rPr lang="en-US" altLang="zh-TW" smtClean="0"/>
+              <a:rPr lang="en-US" altLang="zh-TW"/>
               <a:t>Third level</a:t>
             </a:r>
           </a:p>
           <a:p>
             <a:pPr lvl="3"/>
             <a:r>
-              <a:rPr lang="en-US" altLang="zh-TW" smtClean="0"/>
+              <a:rPr lang="en-US" altLang="zh-TW"/>
               <a:t>Fourth level</a:t>
             </a:r>
           </a:p>
           <a:p>
             <a:pPr lvl="4"/>
             <a:r>
-              <a:rPr lang="en-US" altLang="zh-TW" smtClean="0"/>
+              <a:rPr lang="en-US" altLang="zh-TW"/>
               <a:t>Fifth level</a:t>
             </a:r>
             <a:endParaRPr lang="zh-TW" altLang="en-US"/>
@@ -473,7 +473,7 @@
           <a:p>
             <a:fld id="{73CDC8B0-617F-4E4B-B385-906482340634}" type="datetimeFigureOut">
               <a:rPr lang="en-US" smtClean="0"/>
-              <a:t>2/18/2023</a:t>
+              <a:t>3/6/2026</a:t>
             </a:fld>
             <a:endParaRPr lang="en-US"/>
           </a:p>
@@ -567,7 +567,7 @@
           <a:lstStyle/>
           <a:p>
             <a:r>
-              <a:rPr lang="en-US" altLang="zh-TW" smtClean="0"/>
+              <a:rPr lang="en-US" altLang="zh-TW"/>
               <a:t>Click to edit Master title style</a:t>
             </a:r>
             <a:endParaRPr lang="zh-TW" altLang="en-US"/>
@@ -596,35 +596,35 @@
           <a:p>
             <a:pPr lvl="0"/>
             <a:r>
-              <a:rPr lang="en-US" altLang="zh-TW" smtClean="0"/>
+              <a:rPr lang="en-US" altLang="zh-TW"/>
               <a:t>Click to edit Master text styles</a:t>
             </a:r>
           </a:p>
           <a:p>
             <a:pPr lvl="1"/>
             <a:r>
-              <a:rPr lang="en-US" altLang="zh-TW" smtClean="0"/>
+              <a:rPr lang="en-US" altLang="zh-TW"/>
               <a:t>Second level</a:t>
             </a:r>
           </a:p>
           <a:p>
             <a:pPr lvl="2"/>
             <a:r>
-              <a:rPr lang="en-US" altLang="zh-TW" smtClean="0"/>
+              <a:rPr lang="en-US" altLang="zh-TW"/>
               <a:t>Third level</a:t>
             </a:r>
           </a:p>
           <a:p>
             <a:pPr lvl="3"/>
             <a:r>
-              <a:rPr lang="en-US" altLang="zh-TW" smtClean="0"/>
+              <a:rPr lang="en-US" altLang="zh-TW"/>
               <a:t>Fourth level</a:t>
             </a:r>
           </a:p>
           <a:p>
             <a:pPr lvl="4"/>
             <a:r>
-              <a:rPr lang="en-US" altLang="zh-TW" smtClean="0"/>
+              <a:rPr lang="en-US" altLang="zh-TW"/>
               <a:t>Fifth level</a:t>
             </a:r>
             <a:endParaRPr lang="zh-TW" altLang="en-US"/>
@@ -648,7 +648,7 @@
           <a:p>
             <a:fld id="{73CDC8B0-617F-4E4B-B385-906482340634}" type="datetimeFigureOut">
               <a:rPr lang="en-US" smtClean="0"/>
-              <a:t>2/18/2023</a:t>
+              <a:t>3/6/2026</a:t>
             </a:fld>
             <a:endParaRPr lang="en-US"/>
           </a:p>
@@ -737,7 +737,7 @@
           <a:lstStyle/>
           <a:p>
             <a:r>
-              <a:rPr lang="en-US" altLang="zh-TW" smtClean="0"/>
+              <a:rPr lang="en-US" altLang="zh-TW"/>
               <a:t>Click to edit Master title style</a:t>
             </a:r>
             <a:endParaRPr lang="zh-TW" altLang="en-US"/>
@@ -761,35 +761,35 @@
           <a:p>
             <a:pPr lvl="0"/>
             <a:r>
-              <a:rPr lang="en-US" altLang="zh-TW" smtClean="0"/>
+              <a:rPr lang="en-US" altLang="zh-TW"/>
               <a:t>Click to edit Master text styles</a:t>
             </a:r>
           </a:p>
           <a:p>
             <a:pPr lvl="1"/>
             <a:r>
-              <a:rPr lang="en-US" altLang="zh-TW" smtClean="0"/>
+              <a:rPr lang="en-US" altLang="zh-TW"/>
               <a:t>Second level</a:t>
             </a:r>
           </a:p>
           <a:p>
             <a:pPr lvl="2"/>
             <a:r>
-              <a:rPr lang="en-US" altLang="zh-TW" smtClean="0"/>
+              <a:rPr lang="en-US" altLang="zh-TW"/>
               <a:t>Third level</a:t>
             </a:r>
           </a:p>
           <a:p>
             <a:pPr lvl="3"/>
             <a:r>
-              <a:rPr lang="en-US" altLang="zh-TW" smtClean="0"/>
+              <a:rPr lang="en-US" altLang="zh-TW"/>
               <a:t>Fourth level</a:t>
             </a:r>
           </a:p>
           <a:p>
             <a:pPr lvl="4"/>
             <a:r>
-              <a:rPr lang="en-US" altLang="zh-TW" smtClean="0"/>
+              <a:rPr lang="en-US" altLang="zh-TW"/>
               <a:t>Fifth level</a:t>
             </a:r>
             <a:endParaRPr lang="zh-TW" altLang="en-US"/>
@@ -813,7 +813,7 @@
           <a:p>
             <a:fld id="{73CDC8B0-617F-4E4B-B385-906482340634}" type="datetimeFigureOut">
               <a:rPr lang="en-US" smtClean="0"/>
-              <a:t>2/18/2023</a:t>
+              <a:t>3/6/2026</a:t>
             </a:fld>
             <a:endParaRPr lang="en-US"/>
           </a:p>
@@ -911,7 +911,7 @@
           </a:lstStyle>
           <a:p>
             <a:r>
-              <a:rPr lang="en-US" altLang="zh-TW" smtClean="0"/>
+              <a:rPr lang="en-US" altLang="zh-TW"/>
               <a:t>Click to edit Master title style</a:t>
             </a:r>
             <a:endParaRPr lang="zh-TW" altLang="en-US"/>
@@ -1031,7 +1031,7 @@
           <a:p>
             <a:pPr lvl="0"/>
             <a:r>
-              <a:rPr lang="en-US" altLang="zh-TW" smtClean="0"/>
+              <a:rPr lang="en-US" altLang="zh-TW"/>
               <a:t>Click to edit Master text styles</a:t>
             </a:r>
           </a:p>
@@ -1054,7 +1054,7 @@
           <a:p>
             <a:fld id="{73CDC8B0-617F-4E4B-B385-906482340634}" type="datetimeFigureOut">
               <a:rPr lang="en-US" smtClean="0"/>
-              <a:t>2/18/2023</a:t>
+              <a:t>3/6/2026</a:t>
             </a:fld>
             <a:endParaRPr lang="en-US"/>
           </a:p>
@@ -1143,7 +1143,7 @@
           <a:lstStyle/>
           <a:p>
             <a:r>
-              <a:rPr lang="en-US" altLang="zh-TW" smtClean="0"/>
+              <a:rPr lang="en-US" altLang="zh-TW"/>
               <a:t>Click to edit Master title style</a:t>
             </a:r>
             <a:endParaRPr lang="zh-TW" altLang="en-US"/>
@@ -1200,35 +1200,35 @@
           <a:p>
             <a:pPr lvl="0"/>
             <a:r>
-              <a:rPr lang="en-US" altLang="zh-TW" smtClean="0"/>
+              <a:rPr lang="en-US" altLang="zh-TW"/>
               <a:t>Click to edit Master text styles</a:t>
             </a:r>
           </a:p>
           <a:p>
             <a:pPr lvl="1"/>
             <a:r>
-              <a:rPr lang="en-US" altLang="zh-TW" smtClean="0"/>
+              <a:rPr lang="en-US" altLang="zh-TW"/>
               <a:t>Second level</a:t>
             </a:r>
           </a:p>
           <a:p>
             <a:pPr lvl="2"/>
             <a:r>
-              <a:rPr lang="en-US" altLang="zh-TW" smtClean="0"/>
+              <a:rPr lang="en-US" altLang="zh-TW"/>
               <a:t>Third level</a:t>
             </a:r>
           </a:p>
           <a:p>
             <a:pPr lvl="3"/>
             <a:r>
-              <a:rPr lang="en-US" altLang="zh-TW" smtClean="0"/>
+              <a:rPr lang="en-US" altLang="zh-TW"/>
               <a:t>Fourth level</a:t>
             </a:r>
           </a:p>
           <a:p>
             <a:pPr lvl="4"/>
             <a:r>
-              <a:rPr lang="en-US" altLang="zh-TW" smtClean="0"/>
+              <a:rPr lang="en-US" altLang="zh-TW"/>
               <a:t>Fifth level</a:t>
             </a:r>
             <a:endParaRPr lang="zh-TW" altLang="en-US"/>
@@ -1285,35 +1285,35 @@
           <a:p>
             <a:pPr lvl="0"/>
             <a:r>
-              <a:rPr lang="en-US" altLang="zh-TW" smtClean="0"/>
+              <a:rPr lang="en-US" altLang="zh-TW"/>
               <a:t>Click to edit Master text styles</a:t>
             </a:r>
           </a:p>
           <a:p>
             <a:pPr lvl="1"/>
             <a:r>
-              <a:rPr lang="en-US" altLang="zh-TW" smtClean="0"/>
+              <a:rPr lang="en-US" altLang="zh-TW"/>
               <a:t>Second level</a:t>
             </a:r>
           </a:p>
           <a:p>
             <a:pPr lvl="2"/>
             <a:r>
-              <a:rPr lang="en-US" altLang="zh-TW" smtClean="0"/>
+              <a:rPr lang="en-US" altLang="zh-TW"/>
               <a:t>Third level</a:t>
             </a:r>
           </a:p>
           <a:p>
             <a:pPr lvl="3"/>
             <a:r>
-              <a:rPr lang="en-US" altLang="zh-TW" smtClean="0"/>
+              <a:rPr lang="en-US" altLang="zh-TW"/>
               <a:t>Fourth level</a:t>
             </a:r>
           </a:p>
           <a:p>
             <a:pPr lvl="4"/>
             <a:r>
-              <a:rPr lang="en-US" altLang="zh-TW" smtClean="0"/>
+              <a:rPr lang="en-US" altLang="zh-TW"/>
               <a:t>Fifth level</a:t>
             </a:r>
             <a:endParaRPr lang="zh-TW" altLang="en-US"/>
@@ -1337,7 +1337,7 @@
           <a:p>
             <a:fld id="{73CDC8B0-617F-4E4B-B385-906482340634}" type="datetimeFigureOut">
               <a:rPr lang="en-US" smtClean="0"/>
-              <a:t>2/18/2023</a:t>
+              <a:t>3/6/2026</a:t>
             </a:fld>
             <a:endParaRPr lang="en-US"/>
           </a:p>
@@ -1430,7 +1430,7 @@
           </a:lstStyle>
           <a:p>
             <a:r>
-              <a:rPr lang="en-US" altLang="zh-TW" smtClean="0"/>
+              <a:rPr lang="en-US" altLang="zh-TW"/>
               <a:t>Click to edit Master title style</a:t>
             </a:r>
             <a:endParaRPr lang="zh-TW" altLang="en-US"/>
@@ -1496,7 +1496,7 @@
           <a:p>
             <a:pPr lvl="0"/>
             <a:r>
-              <a:rPr lang="en-US" altLang="zh-TW" smtClean="0"/>
+              <a:rPr lang="en-US" altLang="zh-TW"/>
               <a:t>Click to edit Master text styles</a:t>
             </a:r>
           </a:p>
@@ -1552,35 +1552,35 @@
           <a:p>
             <a:pPr lvl="0"/>
             <a:r>
-              <a:rPr lang="en-US" altLang="zh-TW" smtClean="0"/>
+              <a:rPr lang="en-US" altLang="zh-TW"/>
               <a:t>Click to edit Master text styles</a:t>
             </a:r>
           </a:p>
           <a:p>
             <a:pPr lvl="1"/>
             <a:r>
-              <a:rPr lang="en-US" altLang="zh-TW" smtClean="0"/>
+              <a:rPr lang="en-US" altLang="zh-TW"/>
               <a:t>Second level</a:t>
             </a:r>
           </a:p>
           <a:p>
             <a:pPr lvl="2"/>
             <a:r>
-              <a:rPr lang="en-US" altLang="zh-TW" smtClean="0"/>
+              <a:rPr lang="en-US" altLang="zh-TW"/>
               <a:t>Third level</a:t>
             </a:r>
           </a:p>
           <a:p>
             <a:pPr lvl="3"/>
             <a:r>
-              <a:rPr lang="en-US" altLang="zh-TW" smtClean="0"/>
+              <a:rPr lang="en-US" altLang="zh-TW"/>
               <a:t>Fourth level</a:t>
             </a:r>
           </a:p>
           <a:p>
             <a:pPr lvl="4"/>
             <a:r>
-              <a:rPr lang="en-US" altLang="zh-TW" smtClean="0"/>
+              <a:rPr lang="en-US" altLang="zh-TW"/>
               <a:t>Fifth level</a:t>
             </a:r>
             <a:endParaRPr lang="zh-TW" altLang="en-US"/>
@@ -1646,7 +1646,7 @@
           <a:p>
             <a:pPr lvl="0"/>
             <a:r>
-              <a:rPr lang="en-US" altLang="zh-TW" smtClean="0"/>
+              <a:rPr lang="en-US" altLang="zh-TW"/>
               <a:t>Click to edit Master text styles</a:t>
             </a:r>
           </a:p>
@@ -1702,35 +1702,35 @@
           <a:p>
             <a:pPr lvl="0"/>
             <a:r>
-              <a:rPr lang="en-US" altLang="zh-TW" smtClean="0"/>
+              <a:rPr lang="en-US" altLang="zh-TW"/>
               <a:t>Click to edit Master text styles</a:t>
             </a:r>
           </a:p>
           <a:p>
             <a:pPr lvl="1"/>
             <a:r>
-              <a:rPr lang="en-US" altLang="zh-TW" smtClean="0"/>
+              <a:rPr lang="en-US" altLang="zh-TW"/>
               <a:t>Second level</a:t>
             </a:r>
           </a:p>
           <a:p>
             <a:pPr lvl="2"/>
             <a:r>
-              <a:rPr lang="en-US" altLang="zh-TW" smtClean="0"/>
+              <a:rPr lang="en-US" altLang="zh-TW"/>
               <a:t>Third level</a:t>
             </a:r>
           </a:p>
           <a:p>
             <a:pPr lvl="3"/>
             <a:r>
-              <a:rPr lang="en-US" altLang="zh-TW" smtClean="0"/>
+              <a:rPr lang="en-US" altLang="zh-TW"/>
               <a:t>Fourth level</a:t>
             </a:r>
           </a:p>
           <a:p>
             <a:pPr lvl="4"/>
             <a:r>
-              <a:rPr lang="en-US" altLang="zh-TW" smtClean="0"/>
+              <a:rPr lang="en-US" altLang="zh-TW"/>
               <a:t>Fifth level</a:t>
             </a:r>
             <a:endParaRPr lang="zh-TW" altLang="en-US"/>
@@ -1754,7 +1754,7 @@
           <a:p>
             <a:fld id="{73CDC8B0-617F-4E4B-B385-906482340634}" type="datetimeFigureOut">
               <a:rPr lang="en-US" smtClean="0"/>
-              <a:t>2/18/2023</a:t>
+              <a:t>3/6/2026</a:t>
             </a:fld>
             <a:endParaRPr lang="en-US"/>
           </a:p>
@@ -1843,7 +1843,7 @@
           <a:lstStyle/>
           <a:p>
             <a:r>
-              <a:rPr lang="en-US" altLang="zh-TW" smtClean="0"/>
+              <a:rPr lang="en-US" altLang="zh-TW"/>
               <a:t>Click to edit Master title style</a:t>
             </a:r>
             <a:endParaRPr lang="zh-TW" altLang="en-US"/>
@@ -1867,7 +1867,7 @@
           <a:p>
             <a:fld id="{73CDC8B0-617F-4E4B-B385-906482340634}" type="datetimeFigureOut">
               <a:rPr lang="en-US" smtClean="0"/>
-              <a:t>2/18/2023</a:t>
+              <a:t>3/6/2026</a:t>
             </a:fld>
             <a:endParaRPr lang="en-US"/>
           </a:p>
@@ -1957,7 +1957,7 @@
           <a:p>
             <a:fld id="{73CDC8B0-617F-4E4B-B385-906482340634}" type="datetimeFigureOut">
               <a:rPr lang="en-US" smtClean="0"/>
-              <a:t>2/18/2023</a:t>
+              <a:t>3/6/2026</a:t>
             </a:fld>
             <a:endParaRPr lang="en-US"/>
           </a:p>
@@ -2055,7 +2055,7 @@
           </a:lstStyle>
           <a:p>
             <a:r>
-              <a:rPr lang="en-US" altLang="zh-TW" smtClean="0"/>
+              <a:rPr lang="en-US" altLang="zh-TW"/>
               <a:t>Click to edit Master title style</a:t>
             </a:r>
             <a:endParaRPr lang="zh-TW" altLang="en-US"/>
@@ -2112,35 +2112,35 @@
           <a:p>
             <a:pPr lvl="0"/>
             <a:r>
-              <a:rPr lang="en-US" altLang="zh-TW" smtClean="0"/>
+              <a:rPr lang="en-US" altLang="zh-TW"/>
               <a:t>Click to edit Master text styles</a:t>
             </a:r>
           </a:p>
           <a:p>
             <a:pPr lvl="1"/>
             <a:r>
-              <a:rPr lang="en-US" altLang="zh-TW" smtClean="0"/>
+              <a:rPr lang="en-US" altLang="zh-TW"/>
               <a:t>Second level</a:t>
             </a:r>
           </a:p>
           <a:p>
             <a:pPr lvl="2"/>
             <a:r>
-              <a:rPr lang="en-US" altLang="zh-TW" smtClean="0"/>
+              <a:rPr lang="en-US" altLang="zh-TW"/>
               <a:t>Third level</a:t>
             </a:r>
           </a:p>
           <a:p>
             <a:pPr lvl="3"/>
             <a:r>
-              <a:rPr lang="en-US" altLang="zh-TW" smtClean="0"/>
+              <a:rPr lang="en-US" altLang="zh-TW"/>
               <a:t>Fourth level</a:t>
             </a:r>
           </a:p>
           <a:p>
             <a:pPr lvl="4"/>
             <a:r>
-              <a:rPr lang="en-US" altLang="zh-TW" smtClean="0"/>
+              <a:rPr lang="en-US" altLang="zh-TW"/>
               <a:t>Fifth level</a:t>
             </a:r>
             <a:endParaRPr lang="zh-TW" altLang="en-US"/>
@@ -2206,7 +2206,7 @@
           <a:p>
             <a:pPr lvl="0"/>
             <a:r>
-              <a:rPr lang="en-US" altLang="zh-TW" smtClean="0"/>
+              <a:rPr lang="en-US" altLang="zh-TW"/>
               <a:t>Click to edit Master text styles</a:t>
             </a:r>
           </a:p>
@@ -2229,7 +2229,7 @@
           <a:p>
             <a:fld id="{73CDC8B0-617F-4E4B-B385-906482340634}" type="datetimeFigureOut">
               <a:rPr lang="en-US" smtClean="0"/>
-              <a:t>2/18/2023</a:t>
+              <a:t>3/6/2026</a:t>
             </a:fld>
             <a:endParaRPr lang="en-US"/>
           </a:p>
@@ -2327,7 +2327,7 @@
           </a:lstStyle>
           <a:p>
             <a:r>
-              <a:rPr lang="en-US" altLang="zh-TW" smtClean="0"/>
+              <a:rPr lang="en-US" altLang="zh-TW"/>
               <a:t>Click to edit Master title style</a:t>
             </a:r>
             <a:endParaRPr lang="zh-TW" altLang="en-US"/>
@@ -2392,7 +2392,7 @@
           </a:lstStyle>
           <a:p>
             <a:r>
-              <a:rPr lang="en-US" altLang="zh-TW" smtClean="0"/>
+              <a:rPr lang="en-US" altLang="zh-TW"/>
               <a:t>Click icon to add picture</a:t>
             </a:r>
             <a:endParaRPr lang="zh-TW" altLang="en-US"/>
@@ -2458,7 +2458,7 @@
           <a:p>
             <a:pPr lvl="0"/>
             <a:r>
-              <a:rPr lang="en-US" altLang="zh-TW" smtClean="0"/>
+              <a:rPr lang="en-US" altLang="zh-TW"/>
               <a:t>Click to edit Master text styles</a:t>
             </a:r>
           </a:p>
@@ -2481,7 +2481,7 @@
           <a:p>
             <a:fld id="{73CDC8B0-617F-4E4B-B385-906482340634}" type="datetimeFigureOut">
               <a:rPr lang="en-US" smtClean="0"/>
-              <a:t>2/18/2023</a:t>
+              <a:t>3/6/2026</a:t>
             </a:fld>
             <a:endParaRPr lang="en-US"/>
           </a:p>
@@ -2590,10 +2590,9 @@
           <a:lstStyle/>
           <a:p>
             <a:r>
-              <a:rPr lang="zh-TW" altLang="en-US" smtClean="0"/>
+              <a:rPr lang="zh-TW" altLang="en-US"/>
               <a:t>按一下以編輯母片標題樣式</a:t>
             </a:r>
-            <a:endParaRPr lang="zh-TW" altLang="en-US"/>
           </a:p>
         </p:txBody>
       </p:sp>
@@ -2624,38 +2623,37 @@
           <a:p>
             <a:pPr lvl="0"/>
             <a:r>
-              <a:rPr lang="zh-TW" altLang="en-US" smtClean="0"/>
+              <a:rPr lang="zh-TW" altLang="en-US"/>
               <a:t>按一下以編輯母片文字樣式</a:t>
             </a:r>
           </a:p>
           <a:p>
             <a:pPr lvl="1"/>
             <a:r>
-              <a:rPr lang="zh-TW" altLang="en-US" smtClean="0"/>
+              <a:rPr lang="zh-TW" altLang="en-US"/>
               <a:t>第二層</a:t>
             </a:r>
           </a:p>
           <a:p>
             <a:pPr lvl="2"/>
             <a:r>
-              <a:rPr lang="zh-TW" altLang="en-US" smtClean="0"/>
+              <a:rPr lang="zh-TW" altLang="en-US"/>
               <a:t>第三層</a:t>
             </a:r>
           </a:p>
           <a:p>
             <a:pPr lvl="3"/>
             <a:r>
-              <a:rPr lang="zh-TW" altLang="en-US" smtClean="0"/>
+              <a:rPr lang="zh-TW" altLang="en-US"/>
               <a:t>第四層</a:t>
             </a:r>
           </a:p>
           <a:p>
             <a:pPr lvl="4"/>
             <a:r>
-              <a:rPr lang="zh-TW" altLang="en-US" smtClean="0"/>
+              <a:rPr lang="zh-TW" altLang="en-US"/>
               <a:t>第五層</a:t>
             </a:r>
-            <a:endParaRPr lang="zh-TW" altLang="en-US"/>
           </a:p>
         </p:txBody>
       </p:sp>
@@ -2694,7 +2692,7 @@
           <a:p>
             <a:fld id="{73CDC8B0-617F-4E4B-B385-906482340634}" type="datetimeFigureOut">
               <a:rPr lang="en-US" smtClean="0"/>
-              <a:t>2/18/2023</a:t>
+              <a:t>3/6/2026</a:t>
             </a:fld>
             <a:endParaRPr lang="en-US"/>
           </a:p>
@@ -3087,7 +3085,7 @@
           <a:lstStyle/>
           <a:p>
             <a:r>
-              <a:rPr lang="zh-CN" altLang="en-US" sz="5400" b="1" i="1" dirty="0" smtClean="0">
+              <a:rPr lang="zh-CN" altLang="en-US" sz="5400" b="1" i="1" dirty="0">
                 <a:solidFill>
                   <a:srgbClr val="000066"/>
                 </a:solidFill>
@@ -3101,10 +3099,10 @@
                 <a:latin typeface="微軟正黑體" pitchFamily="34" charset="-120"/>
                 <a:ea typeface="微軟正黑體" pitchFamily="34" charset="-120"/>
               </a:rPr>
-              <a:t>袮</a:t>
-            </a:r>
-            <a:r>
-              <a:rPr lang="zh-TW" altLang="en-US" sz="5400" b="1" i="1" dirty="0" smtClean="0">
+              <a:t>祢</a:t>
+            </a:r>
+            <a:r>
+              <a:rPr lang="zh-TW" altLang="en-US" sz="5400" b="1" i="1" dirty="0">
                 <a:solidFill>
                   <a:srgbClr val="000066"/>
                 </a:solidFill>
@@ -3118,24 +3116,7 @@
                 <a:latin typeface="微軟正黑體" pitchFamily="34" charset="-120"/>
                 <a:ea typeface="微軟正黑體" pitchFamily="34" charset="-120"/>
               </a:rPr>
-              <a:t>的</a:t>
-            </a:r>
-            <a:r>
-              <a:rPr lang="zh-TW" altLang="en-US" sz="5400" b="1" i="1" dirty="0">
-                <a:solidFill>
-                  <a:srgbClr val="000066"/>
-                </a:solidFill>
-                <a:effectLst>
-                  <a:outerShdw blurRad="38100" dist="38100" dir="2700000" algn="tl">
-                    <a:srgbClr val="000000">
-                      <a:alpha val="43137"/>
-                    </a:srgbClr>
-                  </a:outerShdw>
-                </a:effectLst>
-                <a:latin typeface="微軟正黑體" pitchFamily="34" charset="-120"/>
-                <a:ea typeface="微軟正黑體" pitchFamily="34" charset="-120"/>
-              </a:rPr>
-              <a:t>愛長闊高深</a:t>
+              <a:t>的愛長闊高深</a:t>
             </a:r>
           </a:p>
         </p:txBody>
@@ -3196,34 +3177,24 @@
               <a:buNone/>
             </a:pPr>
             <a:r>
-              <a:rPr lang="zh-CN" altLang="en-US" sz="4800" b="1" dirty="0" smtClean="0">
+              <a:rPr lang="zh-CN" altLang="en-US" sz="4800" b="1" dirty="0">
                 <a:solidFill>
                   <a:srgbClr val="000066"/>
                 </a:solidFill>
                 <a:latin typeface="微軟正黑體" pitchFamily="34" charset="-120"/>
                 <a:ea typeface="微軟正黑體" pitchFamily="34" charset="-120"/>
               </a:rPr>
-              <a:t>袮</a:t>
-            </a:r>
-            <a:r>
-              <a:rPr lang="zh-TW" altLang="en-US" sz="4800" b="1" dirty="0" smtClean="0">
+              <a:t>祢</a:t>
+            </a:r>
+            <a:r>
+              <a:rPr lang="zh-TW" altLang="en-US" sz="4800" b="1" dirty="0">
                 <a:solidFill>
                   <a:srgbClr val="000066"/>
                 </a:solidFill>
                 <a:latin typeface="微軟正黑體" pitchFamily="34" charset="-120"/>
                 <a:ea typeface="微軟正黑體" pitchFamily="34" charset="-120"/>
               </a:rPr>
-              <a:t>的</a:t>
-            </a:r>
-            <a:r>
-              <a:rPr lang="zh-TW" altLang="en-US" sz="4800" b="1" dirty="0">
-                <a:solidFill>
-                  <a:srgbClr val="000066"/>
-                </a:solidFill>
-                <a:latin typeface="微軟正黑體" pitchFamily="34" charset="-120"/>
-                <a:ea typeface="微軟正黑體" pitchFamily="34" charset="-120"/>
-              </a:rPr>
-              <a:t>愛長闊高深</a:t>
+              <a:t>的愛長闊高深</a:t>
             </a:r>
             <a:endParaRPr lang="en-US" altLang="zh-TW" sz="4800" b="1" dirty="0">
               <a:solidFill>
@@ -3245,27 +3216,17 @@
                 <a:latin typeface="微軟正黑體" pitchFamily="34" charset="-120"/>
                 <a:ea typeface="微軟正黑體" pitchFamily="34" charset="-120"/>
               </a:rPr>
-              <a:t>袮</a:t>
-            </a:r>
-            <a:r>
-              <a:rPr lang="zh-TW" altLang="en-US" sz="4800" b="1" dirty="0" smtClean="0">
+              <a:t>祢</a:t>
+            </a:r>
+            <a:r>
+              <a:rPr lang="zh-TW" altLang="en-US" sz="4800" b="1" dirty="0">
                 <a:solidFill>
                   <a:srgbClr val="000066"/>
                 </a:solidFill>
                 <a:latin typeface="微軟正黑體" pitchFamily="34" charset="-120"/>
                 <a:ea typeface="微軟正黑體" pitchFamily="34" charset="-120"/>
               </a:rPr>
-              <a:t>的</a:t>
-            </a:r>
-            <a:r>
-              <a:rPr lang="zh-TW" altLang="en-US" sz="4800" b="1" dirty="0">
-                <a:solidFill>
-                  <a:srgbClr val="000066"/>
-                </a:solidFill>
-                <a:latin typeface="微軟正黑體" pitchFamily="34" charset="-120"/>
-                <a:ea typeface="微軟正黑體" pitchFamily="34" charset="-120"/>
-              </a:rPr>
-              <a:t>信實永不改變</a:t>
+              <a:t>的信實永不改變</a:t>
             </a:r>
             <a:endParaRPr lang="en-US" altLang="zh-TW" sz="4800" b="1" dirty="0">
               <a:solidFill>
@@ -3301,7 +3262,7 @@
           <a:p>
             <a:pPr algn="ctr"/>
             <a:r>
-              <a:rPr lang="en-US" sz="2800" b="1" dirty="0" smtClean="0">
+              <a:rPr lang="en-US" sz="2800" b="1" dirty="0">
                 <a:solidFill>
                   <a:srgbClr val="000066"/>
                 </a:solidFill>
@@ -3311,7 +3272,7 @@
               <a:t>( </a:t>
             </a:r>
             <a:r>
-              <a:rPr lang="zh-CN" altLang="en-US" sz="2800" b="1" dirty="0" smtClean="0">
+              <a:rPr lang="zh-CN" altLang="en-US" sz="2800" b="1" dirty="0">
                 <a:solidFill>
                   <a:srgbClr val="000066"/>
                 </a:solidFill>
@@ -3321,7 +3282,7 @@
               <a:t>正歌</a:t>
             </a:r>
             <a:r>
-              <a:rPr lang="en-US" sz="2800" b="1" dirty="0" smtClean="0">
+              <a:rPr lang="en-US" sz="2800" b="1" dirty="0">
                 <a:solidFill>
                   <a:srgbClr val="000066"/>
                 </a:solidFill>
@@ -3424,27 +3385,17 @@
                 <a:latin typeface="微軟正黑體" pitchFamily="34" charset="-120"/>
                 <a:ea typeface="微軟正黑體" pitchFamily="34" charset="-120"/>
               </a:rPr>
-              <a:t>袮</a:t>
-            </a:r>
-            <a:r>
-              <a:rPr lang="zh-TW" altLang="en-US" sz="4800" b="1" dirty="0" smtClean="0">
+              <a:t>祢</a:t>
+            </a:r>
+            <a:r>
+              <a:rPr lang="zh-TW" altLang="en-US" sz="4800" b="1" dirty="0">
                 <a:solidFill>
                   <a:srgbClr val="000066"/>
                 </a:solidFill>
                 <a:latin typeface="Microsoft JhengHei" pitchFamily="34" charset="-120"/>
                 <a:ea typeface="Microsoft JhengHei" pitchFamily="34" charset="-120"/>
               </a:rPr>
-              <a:t>應</a:t>
-            </a:r>
-            <a:r>
-              <a:rPr lang="zh-TW" altLang="en-US" sz="4800" b="1" dirty="0">
-                <a:solidFill>
-                  <a:srgbClr val="000066"/>
-                </a:solidFill>
-                <a:latin typeface="Microsoft JhengHei" pitchFamily="34" charset="-120"/>
-                <a:ea typeface="Microsoft JhengHei" pitchFamily="34" charset="-120"/>
-              </a:rPr>
-              <a:t>許我得安慰</a:t>
+              <a:t>應許我得安慰</a:t>
             </a:r>
             <a:endParaRPr lang="en-US" sz="4800" b="1" dirty="0">
               <a:solidFill>
@@ -3480,7 +3431,7 @@
           <a:p>
             <a:pPr algn="ctr"/>
             <a:r>
-              <a:rPr lang="en-US" sz="2800" b="1" dirty="0" smtClean="0">
+              <a:rPr lang="en-US" sz="2800" b="1" dirty="0">
                 <a:solidFill>
                   <a:srgbClr val="000066"/>
                 </a:solidFill>
@@ -3490,7 +3441,7 @@
               <a:t>( </a:t>
             </a:r>
             <a:r>
-              <a:rPr lang="zh-CN" altLang="en-US" sz="2800" b="1" dirty="0" smtClean="0">
+              <a:rPr lang="zh-CN" altLang="en-US" sz="2800" b="1" dirty="0">
                 <a:solidFill>
                   <a:srgbClr val="000066"/>
                 </a:solidFill>
@@ -3500,7 +3451,7 @@
               <a:t>正歌</a:t>
             </a:r>
             <a:r>
-              <a:rPr lang="en-US" sz="2800" b="1" dirty="0" smtClean="0">
+              <a:rPr lang="en-US" sz="2800" b="1" dirty="0">
                 <a:solidFill>
                   <a:srgbClr val="000066"/>
                 </a:solidFill>
@@ -3603,20 +3554,10 @@
                 <a:latin typeface="Microsoft JhengHei" pitchFamily="34" charset="-120"/>
                 <a:ea typeface="Microsoft JhengHei" pitchFamily="34" charset="-120"/>
               </a:rPr>
-              <a:t>我敬</a:t>
-            </a:r>
-            <a:r>
-              <a:rPr lang="zh-TW" altLang="en-US" sz="4800" b="1" dirty="0" smtClean="0">
-                <a:solidFill>
-                  <a:srgbClr val="000066"/>
-                </a:solidFill>
-                <a:latin typeface="Microsoft JhengHei" pitchFamily="34" charset="-120"/>
-                <a:ea typeface="Microsoft JhengHei" pitchFamily="34" charset="-120"/>
-              </a:rPr>
-              <a:t>畏</a:t>
-            </a:r>
-            <a:r>
-              <a:rPr lang="zh-CN" altLang="en-US" sz="4800" b="1" dirty="0" smtClean="0">
+              <a:t>我敬畏</a:t>
+            </a:r>
+            <a:r>
+              <a:rPr lang="zh-CN" altLang="en-US" sz="4800" b="1" dirty="0">
                 <a:solidFill>
                   <a:srgbClr val="000066"/>
                 </a:solidFill>
@@ -3626,34 +3567,14 @@
               <a:t>  </a:t>
             </a:r>
             <a:r>
-              <a:rPr lang="zh-TW" altLang="en-US" sz="4800" b="1" dirty="0" smtClean="0">
+              <a:rPr lang="zh-TW" altLang="en-US" sz="4800" b="1" dirty="0">
                 <a:solidFill>
                   <a:srgbClr val="000066"/>
                 </a:solidFill>
                 <a:latin typeface="Microsoft JhengHei" pitchFamily="34" charset="-120"/>
                 <a:ea typeface="Microsoft JhengHei" pitchFamily="34" charset="-120"/>
               </a:rPr>
-              <a:t>我</a:t>
-            </a:r>
-            <a:r>
-              <a:rPr lang="zh-TW" altLang="en-US" sz="4800" b="1" dirty="0">
-                <a:solidFill>
-                  <a:srgbClr val="000066"/>
-                </a:solidFill>
-                <a:latin typeface="Microsoft JhengHei" pitchFamily="34" charset="-120"/>
-                <a:ea typeface="Microsoft JhengHei" pitchFamily="34" charset="-120"/>
-              </a:rPr>
-              <a:t>等</a:t>
-            </a:r>
-            <a:r>
-              <a:rPr lang="zh-TW" altLang="en-US" sz="4800" b="1" dirty="0" smtClean="0">
-                <a:solidFill>
-                  <a:srgbClr val="000066"/>
-                </a:solidFill>
-                <a:latin typeface="Microsoft JhengHei" pitchFamily="34" charset="-120"/>
-                <a:ea typeface="Microsoft JhengHei" pitchFamily="34" charset="-120"/>
-              </a:rPr>
-              <a:t>候</a:t>
+              <a:t>我等候</a:t>
             </a:r>
             <a:r>
               <a:rPr lang="zh-CN" altLang="en-US" sz="4800" b="1" dirty="0">
@@ -3663,7 +3584,7 @@
                 <a:latin typeface="微軟正黑體" pitchFamily="34" charset="-120"/>
                 <a:ea typeface="微軟正黑體" pitchFamily="34" charset="-120"/>
               </a:rPr>
-              <a:t>袮</a:t>
+              <a:t>祢</a:t>
             </a:r>
             <a:endParaRPr lang="en-US" altLang="zh-TW" sz="4800" b="1" dirty="0">
               <a:solidFill>
@@ -3699,7 +3620,7 @@
           <a:p>
             <a:pPr algn="ctr"/>
             <a:r>
-              <a:rPr lang="en-US" sz="2800" b="1" dirty="0" smtClean="0">
+              <a:rPr lang="en-US" sz="2800" b="1" dirty="0">
                 <a:solidFill>
                   <a:srgbClr val="000066"/>
                 </a:solidFill>
@@ -3709,7 +3630,7 @@
               <a:t>( </a:t>
             </a:r>
             <a:r>
-              <a:rPr lang="zh-CN" altLang="en-US" sz="2800" b="1" dirty="0" smtClean="0">
+              <a:rPr lang="zh-CN" altLang="en-US" sz="2800" b="1" dirty="0">
                 <a:solidFill>
                   <a:srgbClr val="000066"/>
                 </a:solidFill>
@@ -3719,7 +3640,7 @@
               <a:t>副歌</a:t>
             </a:r>
             <a:r>
-              <a:rPr lang="en-US" sz="2800" b="1" dirty="0" smtClean="0">
+              <a:rPr lang="en-US" sz="2800" b="1" dirty="0">
                 <a:solidFill>
                   <a:srgbClr val="000066"/>
                 </a:solidFill>
@@ -3822,17 +3743,7 @@
                 <a:latin typeface="Microsoft JhengHei" pitchFamily="34" charset="-120"/>
                 <a:ea typeface="Microsoft JhengHei" pitchFamily="34" charset="-120"/>
               </a:rPr>
-              <a:t>我的主  我讚</a:t>
-            </a:r>
-            <a:r>
-              <a:rPr lang="zh-TW" altLang="en-US" sz="4800" b="1" dirty="0" smtClean="0">
-                <a:solidFill>
-                  <a:srgbClr val="000066"/>
-                </a:solidFill>
-                <a:latin typeface="Microsoft JhengHei" pitchFamily="34" charset="-120"/>
-                <a:ea typeface="Microsoft JhengHei" pitchFamily="34" charset="-120"/>
-              </a:rPr>
-              <a:t>美</a:t>
+              <a:t>我的主  我讚美</a:t>
             </a:r>
             <a:r>
               <a:rPr lang="zh-CN" altLang="en-US" sz="4800" b="1" dirty="0">
@@ -3842,7 +3753,7 @@
                 <a:latin typeface="微軟正黑體" pitchFamily="34" charset="-120"/>
                 <a:ea typeface="微軟正黑體" pitchFamily="34" charset="-120"/>
               </a:rPr>
-              <a:t>袮</a:t>
+              <a:t>祢</a:t>
             </a:r>
             <a:endParaRPr lang="en-US" sz="4800" b="1" dirty="0">
               <a:solidFill>
@@ -3878,7 +3789,7 @@
           <a:p>
             <a:pPr algn="ctr"/>
             <a:r>
-              <a:rPr lang="en-US" sz="2800" b="1" dirty="0" smtClean="0">
+              <a:rPr lang="en-US" sz="2800" b="1" dirty="0">
                 <a:solidFill>
                   <a:srgbClr val="000066"/>
                 </a:solidFill>
@@ -3888,7 +3799,7 @@
               <a:t>( </a:t>
             </a:r>
             <a:r>
-              <a:rPr lang="zh-CN" altLang="en-US" sz="2800" b="1" dirty="0" smtClean="0">
+              <a:rPr lang="zh-CN" altLang="en-US" sz="2800" b="1" dirty="0">
                 <a:solidFill>
                   <a:srgbClr val="000066"/>
                 </a:solidFill>
@@ -3898,7 +3809,7 @@
               <a:t>副歌</a:t>
             </a:r>
             <a:r>
-              <a:rPr lang="en-US" sz="2800" b="1" dirty="0" smtClean="0">
+              <a:rPr lang="en-US" sz="2800" b="1" dirty="0">
                 <a:solidFill>
                   <a:srgbClr val="000066"/>
                 </a:solidFill>
